--- a/AI_DevOps_Reviewer_Presentation.pptx
+++ b/AI_DevOps_Reviewer_Presentation.pptx
@@ -144,12 +144,12 @@
   <pc:docChgLst>
     <pc:chgData name="Patel, Dhvani" userId="bade4e20-56a7-4987-9b57-91f4f3638932" providerId="ADAL" clId="{C1C67717-BD8A-582E-897C-1D3D867DE9EC}"/>
     <pc:docChg chg="undo custSel addSld delSld modSld">
-      <pc:chgData name="Patel, Dhvani" userId="bade4e20-56a7-4987-9b57-91f4f3638932" providerId="ADAL" clId="{C1C67717-BD8A-582E-897C-1D3D867DE9EC}" dt="2026-10-24T08:38:56.287" v="85" actId="1076"/>
+      <pc:chgData name="Patel, Dhvani" userId="bade4e20-56a7-4987-9b57-91f4f3638932" providerId="ADAL" clId="{C1C67717-BD8A-582E-897C-1D3D867DE9EC}" dt="2026-10-24T08:55:33.937" v="127" actId="20577"/>
       <pc:docMkLst>
         <pc:docMk/>
       </pc:docMkLst>
-      <pc:sldChg chg="delSp modSp mod">
-        <pc:chgData name="Patel, Dhvani" userId="bade4e20-56a7-4987-9b57-91f4f3638932" providerId="ADAL" clId="{C1C67717-BD8A-582E-897C-1D3D867DE9EC}" dt="2026-10-24T08:38:25.407" v="83" actId="478"/>
+      <pc:sldChg chg="addSp delSp modSp mod">
+        <pc:chgData name="Patel, Dhvani" userId="bade4e20-56a7-4987-9b57-91f4f3638932" providerId="ADAL" clId="{C1C67717-BD8A-582E-897C-1D3D867DE9EC}" dt="2026-10-24T08:55:33.937" v="127" actId="20577"/>
         <pc:sldMkLst>
           <pc:docMk/>
           <pc:sldMk cId="0" sldId="256"/>
@@ -168,6 +168,14 @@
             <pc:docMk/>
             <pc:sldMk cId="0" sldId="256"/>
             <ac:spMk id="15" creationId="{00000000-0000-0000-0000-000000000000}"/>
+          </ac:spMkLst>
+        </pc:spChg>
+        <pc:spChg chg="add mod">
+          <ac:chgData name="Patel, Dhvani" userId="bade4e20-56a7-4987-9b57-91f4f3638932" providerId="ADAL" clId="{C1C67717-BD8A-582E-897C-1D3D867DE9EC}" dt="2026-10-24T08:55:33.937" v="127" actId="20577"/>
+          <ac:spMkLst>
+            <pc:docMk/>
+            <pc:sldMk cId="0" sldId="256"/>
+            <ac:spMk id="18" creationId="{1C68D99A-EE4E-4828-1A4D-0A522C2279A0}"/>
           </ac:spMkLst>
         </pc:spChg>
       </pc:sldChg>
@@ -279,6 +287,36 @@
             <pc:docMk/>
             <pc:sldMk cId="0" sldId="258"/>
             <ac:spMk id="24" creationId="{00000000-0000-0000-0000-000000000000}"/>
+          </ac:spMkLst>
+        </pc:spChg>
+      </pc:sldChg>
+      <pc:sldChg chg="modSp mod">
+        <pc:chgData name="Patel, Dhvani" userId="bade4e20-56a7-4987-9b57-91f4f3638932" providerId="ADAL" clId="{C1C67717-BD8A-582E-897C-1D3D867DE9EC}" dt="2026-10-24T08:49:19.350" v="86" actId="20577"/>
+        <pc:sldMkLst>
+          <pc:docMk/>
+          <pc:sldMk cId="0" sldId="260"/>
+        </pc:sldMkLst>
+        <pc:spChg chg="mod">
+          <ac:chgData name="Patel, Dhvani" userId="bade4e20-56a7-4987-9b57-91f4f3638932" providerId="ADAL" clId="{C1C67717-BD8A-582E-897C-1D3D867DE9EC}" dt="2026-10-24T08:49:19.350" v="86" actId="20577"/>
+          <ac:spMkLst>
+            <pc:docMk/>
+            <pc:sldMk cId="0" sldId="260"/>
+            <ac:spMk id="3" creationId="{00000000-0000-0000-0000-000000000000}"/>
+          </ac:spMkLst>
+        </pc:spChg>
+      </pc:sldChg>
+      <pc:sldChg chg="modSp mod">
+        <pc:chgData name="Patel, Dhvani" userId="bade4e20-56a7-4987-9b57-91f4f3638932" providerId="ADAL" clId="{C1C67717-BD8A-582E-897C-1D3D867DE9EC}" dt="2026-10-24T08:51:42.785" v="87" actId="122"/>
+        <pc:sldMkLst>
+          <pc:docMk/>
+          <pc:sldMk cId="0" sldId="265"/>
+        </pc:sldMkLst>
+        <pc:spChg chg="mod">
+          <ac:chgData name="Patel, Dhvani" userId="bade4e20-56a7-4987-9b57-91f4f3638932" providerId="ADAL" clId="{C1C67717-BD8A-582E-897C-1D3D867DE9EC}" dt="2026-10-24T08:51:42.785" v="87" actId="122"/>
+          <ac:spMkLst>
+            <pc:docMk/>
+            <pc:sldMk cId="0" sldId="265"/>
+            <ac:spMk id="9" creationId="{00000000-0000-0000-0000-000000000000}"/>
           </ac:spMkLst>
         </pc:spChg>
       </pc:sldChg>
@@ -3927,6 +3965,51 @@
           </a:p>
         </p:txBody>
       </p:sp>
+      <p:sp>
+        <p:nvSpPr>
+          <p:cNvPr id="18" name="TextBox 17">
+            <a:extLst>
+              <a:ext uri="{FF2B5EF4-FFF2-40B4-BE49-F238E27FC236}">
+                <a16:creationId xmlns:a16="http://schemas.microsoft.com/office/drawing/2014/main" id="{1C68D99A-EE4E-4828-1A4D-0A522C2279A0}"/>
+              </a:ext>
+            </a:extLst>
+          </p:cNvPr>
+          <p:cNvSpPr txBox="1"/>
+          <p:nvPr/>
+        </p:nvSpPr>
+        <p:spPr>
+          <a:xfrm>
+            <a:off x="470852" y="5852160"/>
+            <a:ext cx="11247120" cy="292388"/>
+          </a:xfrm>
+          <a:prstGeom prst="rect">
+            <a:avLst/>
+          </a:prstGeom>
+          <a:noFill/>
+        </p:spPr>
+        <p:txBody>
+          <a:bodyPr wrap="square">
+            <a:spAutoFit/>
+          </a:bodyPr>
+          <a:lstStyle/>
+          <a:p>
+            <a:pPr algn="ctr"/>
+            <a:r>
+              <a:rPr lang="en-US" sz="1300" b="0" i="1">
+                <a:solidFill>
+                  <a:srgbClr val="9CA3AF"/>
+                </a:solidFill>
+              </a:rPr>
+              <a:t>- Dhvani Patel [RA2512005010044]</a:t>
+            </a:r>
+            <a:endParaRPr sz="1300" b="0" i="1" dirty="0">
+              <a:solidFill>
+                <a:srgbClr val="9CA3AF"/>
+              </a:solidFill>
+            </a:endParaRPr>
+          </a:p>
+        </p:txBody>
+      </p:sp>
     </p:spTree>
   </p:cSld>
   <p:clrMapOvr>
@@ -4237,20 +4320,20 @@
         <p:spPr>
           <a:xfrm>
             <a:off x="3291840" y="2011680"/>
-            <a:ext cx="1463039" cy="274320"/>
-          </a:xfrm>
-          <a:prstGeom prst="rect">
-            <a:avLst/>
-          </a:prstGeom>
-          <a:noFill/>
-        </p:spPr>
-        <p:txBody>
-          <a:bodyPr wrap="square">
-            <a:spAutoFit/>
-          </a:bodyPr>
-          <a:lstStyle/>
-          <a:p>
-            <a:pPr algn="l"/>
+            <a:ext cx="1463039" cy="292388"/>
+          </a:xfrm>
+          <a:prstGeom prst="rect">
+            <a:avLst/>
+          </a:prstGeom>
+          <a:noFill/>
+        </p:spPr>
+        <p:txBody>
+          <a:bodyPr wrap="square">
+            <a:spAutoFit/>
+          </a:bodyPr>
+          <a:lstStyle/>
+          <a:p>
+            <a:pPr algn="ctr"/>
             <a:r>
               <a:rPr sz="1300" b="1" i="0">
                 <a:solidFill>
@@ -4442,7 +4525,7 @@
           <a:p>
             <a:pPr algn="ctr"/>
             <a:r>
-              <a:rPr sz="1300" b="1" i="0">
+              <a:rPr sz="1300" b="1" i="0" dirty="0">
                 <a:solidFill>
                   <a:srgbClr val="F9FAFB"/>
                 </a:solidFill>
@@ -17555,27 +17638,27 @@
         <p:spPr>
           <a:xfrm>
             <a:off x="502920" y="164592"/>
-            <a:ext cx="11155680" cy="640080"/>
-          </a:xfrm>
-          <a:prstGeom prst="rect">
-            <a:avLst/>
-          </a:prstGeom>
-          <a:noFill/>
-        </p:spPr>
-        <p:txBody>
-          <a:bodyPr wrap="square">
-            <a:spAutoFit/>
-          </a:bodyPr>
-          <a:lstStyle/>
-          <a:p>
-            <a:pPr algn="l"/>
-            <a:r>
-              <a:rPr sz="3200" b="1" i="0">
+            <a:ext cx="11155680" cy="584775"/>
+          </a:xfrm>
+          <a:prstGeom prst="rect">
+            <a:avLst/>
+          </a:prstGeom>
+          <a:noFill/>
+        </p:spPr>
+        <p:txBody>
+          <a:bodyPr wrap="square">
+            <a:spAutoFit/>
+          </a:bodyPr>
+          <a:lstStyle/>
+          <a:p>
+            <a:pPr algn="l"/>
+            <a:r>
+              <a:rPr sz="3200" b="1" i="0" dirty="0">
                 <a:solidFill>
                   <a:srgbClr val="F9FAFB"/>
                 </a:solidFill>
               </a:rPr>
-              <a:t>Development Phases — All 10 Complete ✓</a:t>
+              <a:t>Development Phases</a:t>
             </a:r>
           </a:p>
         </p:txBody>

--- a/AI_DevOps_Reviewer_Presentation.pptx
+++ b/AI_DevOps_Reviewer_Presentation.pptx
@@ -144,7 +144,7 @@
   <pc:docChgLst>
     <pc:chgData name="Patel, Dhvani" userId="bade4e20-56a7-4987-9b57-91f4f3638932" providerId="ADAL" clId="{C1C67717-BD8A-582E-897C-1D3D867DE9EC}"/>
     <pc:docChg chg="undo custSel addSld delSld modSld">
-      <pc:chgData name="Patel, Dhvani" userId="bade4e20-56a7-4987-9b57-91f4f3638932" providerId="ADAL" clId="{C1C67717-BD8A-582E-897C-1D3D867DE9EC}" dt="2026-10-24T08:55:33.937" v="127" actId="20577"/>
+      <pc:chgData name="Patel, Dhvani" userId="bade4e20-56a7-4987-9b57-91f4f3638932" providerId="ADAL" clId="{C1C67717-BD8A-582E-897C-1D3D867DE9EC}" dt="2026-10-30T07:28:58.842" v="130" actId="1076"/>
       <pc:docMkLst>
         <pc:docMk/>
       </pc:docMkLst>
@@ -160,14 +160,6 @@
             <pc:docMk/>
             <pc:sldMk cId="0" sldId="256"/>
             <ac:spMk id="14" creationId="{00000000-0000-0000-0000-000000000000}"/>
-          </ac:spMkLst>
-        </pc:spChg>
-        <pc:spChg chg="del mod">
-          <ac:chgData name="Patel, Dhvani" userId="bade4e20-56a7-4987-9b57-91f4f3638932" providerId="ADAL" clId="{C1C67717-BD8A-582E-897C-1D3D867DE9EC}" dt="2026-10-24T08:38:25.407" v="83" actId="478"/>
-          <ac:spMkLst>
-            <pc:docMk/>
-            <pc:sldMk cId="0" sldId="256"/>
-            <ac:spMk id="15" creationId="{00000000-0000-0000-0000-000000000000}"/>
           </ac:spMkLst>
         </pc:spChg>
         <pc:spChg chg="add mod">
@@ -350,6 +342,29 @@
           </ac:spMkLst>
         </pc:spChg>
       </pc:sldChg>
+      <pc:sldChg chg="modSp mod">
+        <pc:chgData name="Patel, Dhvani" userId="bade4e20-56a7-4987-9b57-91f4f3638932" providerId="ADAL" clId="{C1C67717-BD8A-582E-897C-1D3D867DE9EC}" dt="2026-10-30T07:28:58.842" v="130" actId="1076"/>
+        <pc:sldMkLst>
+          <pc:docMk/>
+          <pc:sldMk cId="0" sldId="270"/>
+        </pc:sldMkLst>
+        <pc:spChg chg="mod">
+          <ac:chgData name="Patel, Dhvani" userId="bade4e20-56a7-4987-9b57-91f4f3638932" providerId="ADAL" clId="{C1C67717-BD8A-582E-897C-1D3D867DE9EC}" dt="2026-10-30T07:28:58.842" v="130" actId="1076"/>
+          <ac:spMkLst>
+            <pc:docMk/>
+            <pc:sldMk cId="0" sldId="270"/>
+            <ac:spMk id="23" creationId="{00000000-0000-0000-0000-000000000000}"/>
+          </ac:spMkLst>
+        </pc:spChg>
+        <pc:spChg chg="mod">
+          <ac:chgData name="Patel, Dhvani" userId="bade4e20-56a7-4987-9b57-91f4f3638932" providerId="ADAL" clId="{C1C67717-BD8A-582E-897C-1D3D867DE9EC}" dt="2026-10-30T07:28:47.804" v="129" actId="1076"/>
+          <ac:spMkLst>
+            <pc:docMk/>
+            <pc:sldMk cId="0" sldId="270"/>
+            <ac:spMk id="28" creationId="{00000000-0000-0000-0000-000000000000}"/>
+          </ac:spMkLst>
+        </pc:spChg>
+      </pc:sldChg>
       <pc:sldChg chg="delSp modSp mod">
         <pc:chgData name="Patel, Dhvani" userId="bade4e20-56a7-4987-9b57-91f4f3638932" providerId="ADAL" clId="{C1C67717-BD8A-582E-897C-1D3D867DE9EC}" dt="2026-10-21T10:01:41.192" v="27"/>
         <pc:sldMkLst>
@@ -572,7 +587,7 @@
           <a:p>
             <a:fld id="{5BCAD085-E8A6-8845-BD4E-CB4CCA059FC4}" type="datetimeFigureOut">
               <a:rPr lang="en-US" smtClean="0"/>
-              <a:t>10/24/26</a:t>
+              <a:t>10/30/26</a:t>
             </a:fld>
             <a:endParaRPr lang="en-US"/>
           </a:p>
@@ -740,7 +755,7 @@
           <a:p>
             <a:fld id="{5BCAD085-E8A6-8845-BD4E-CB4CCA059FC4}" type="datetimeFigureOut">
               <a:rPr lang="en-US" smtClean="0"/>
-              <a:t>10/24/26</a:t>
+              <a:t>10/30/26</a:t>
             </a:fld>
             <a:endParaRPr lang="en-US"/>
           </a:p>
@@ -918,7 +933,7 @@
           <a:p>
             <a:fld id="{5BCAD085-E8A6-8845-BD4E-CB4CCA059FC4}" type="datetimeFigureOut">
               <a:rPr lang="en-US" smtClean="0"/>
-              <a:t>10/24/26</a:t>
+              <a:t>10/30/26</a:t>
             </a:fld>
             <a:endParaRPr lang="en-US"/>
           </a:p>
@@ -1086,7 +1101,7 @@
           <a:p>
             <a:fld id="{5BCAD085-E8A6-8845-BD4E-CB4CCA059FC4}" type="datetimeFigureOut">
               <a:rPr lang="en-US" smtClean="0"/>
-              <a:t>10/24/26</a:t>
+              <a:t>10/30/26</a:t>
             </a:fld>
             <a:endParaRPr lang="en-US"/>
           </a:p>
@@ -1331,7 +1346,7 @@
           <a:p>
             <a:fld id="{5BCAD085-E8A6-8845-BD4E-CB4CCA059FC4}" type="datetimeFigureOut">
               <a:rPr lang="en-US" smtClean="0"/>
-              <a:t>10/24/26</a:t>
+              <a:t>10/30/26</a:t>
             </a:fld>
             <a:endParaRPr lang="en-US"/>
           </a:p>
@@ -1616,7 +1631,7 @@
           <a:p>
             <a:fld id="{5BCAD085-E8A6-8845-BD4E-CB4CCA059FC4}" type="datetimeFigureOut">
               <a:rPr lang="en-US" smtClean="0"/>
-              <a:t>10/24/26</a:t>
+              <a:t>10/30/26</a:t>
             </a:fld>
             <a:endParaRPr lang="en-US"/>
           </a:p>
@@ -2035,7 +2050,7 @@
           <a:p>
             <a:fld id="{5BCAD085-E8A6-8845-BD4E-CB4CCA059FC4}" type="datetimeFigureOut">
               <a:rPr lang="en-US" smtClean="0"/>
-              <a:t>10/24/26</a:t>
+              <a:t>10/30/26</a:t>
             </a:fld>
             <a:endParaRPr lang="en-US"/>
           </a:p>
@@ -2152,7 +2167,7 @@
           <a:p>
             <a:fld id="{5BCAD085-E8A6-8845-BD4E-CB4CCA059FC4}" type="datetimeFigureOut">
               <a:rPr lang="en-US" smtClean="0"/>
-              <a:t>10/24/26</a:t>
+              <a:t>10/30/26</a:t>
             </a:fld>
             <a:endParaRPr lang="en-US"/>
           </a:p>
@@ -2247,7 +2262,7 @@
           <a:p>
             <a:fld id="{5BCAD085-E8A6-8845-BD4E-CB4CCA059FC4}" type="datetimeFigureOut">
               <a:rPr lang="en-US" smtClean="0"/>
-              <a:t>10/24/26</a:t>
+              <a:t>10/30/26</a:t>
             </a:fld>
             <a:endParaRPr lang="en-US"/>
           </a:p>
@@ -2522,7 +2537,7 @@
           <a:p>
             <a:fld id="{5BCAD085-E8A6-8845-BD4E-CB4CCA059FC4}" type="datetimeFigureOut">
               <a:rPr lang="en-US" smtClean="0"/>
-              <a:t>10/24/26</a:t>
+              <a:t>10/30/26</a:t>
             </a:fld>
             <a:endParaRPr lang="en-US"/>
           </a:p>
@@ -2774,7 +2789,7 @@
           <a:p>
             <a:fld id="{5BCAD085-E8A6-8845-BD4E-CB4CCA059FC4}" type="datetimeFigureOut">
               <a:rPr lang="en-US" smtClean="0"/>
-              <a:t>10/24/26</a:t>
+              <a:t>10/30/26</a:t>
             </a:fld>
             <a:endParaRPr lang="en-US"/>
           </a:p>
@@ -2985,7 +3000,7 @@
           <a:p>
             <a:fld id="{5BCAD085-E8A6-8845-BD4E-CB4CCA059FC4}" type="datetimeFigureOut">
               <a:rPr lang="en-US" smtClean="0"/>
-              <a:t>10/24/26</a:t>
+              <a:t>10/30/26</a:t>
             </a:fld>
             <a:endParaRPr lang="en-US"/>
           </a:p>
@@ -12727,7 +12742,7 @@
         </p:nvSpPr>
         <p:spPr>
           <a:xfrm>
-            <a:off x="9235440" y="1143000"/>
+            <a:off x="9235440" y="1152144"/>
             <a:ext cx="2807208" cy="5120640"/>
           </a:xfrm>
           <a:prstGeom prst="rect">
